--- a/presentations/observability-otel-201-spring.pptx
+++ b/presentations/observability-otel-201-spring.pptx
@@ -1242,7 +1242,7 @@
           <a:p>
             <a:r>
               <a:rPr lang="en-US" dirty="0"/>
-              <a:t>The agent's Micrometer bridge already produces protocol-level metrics for free — request duration histograms for the REST endpoint, call counts for the gRPC clients. None of those can answer 'how many orders were rejected,' because that distinction lives in the order's own status field. status takes exactly two values, so tagging by it produces exactly two time series regardless of traffic volume — the opposite of tagging by customer_id or cart.id, which would be unbounded. What to show: this exact line, then a Mimir query for orders_placed_total.</a:t>
+              <a:t>The agent's Micrometer bridge already produces protocol-level metrics with no extra code — request duration histograms for the REST endpoint, call counts for the gRPC clients. None of those can answer 'how many orders were rejected,' because that distinction lives in the order's own status field. status takes exactly two values, so tagging by it produces exactly two time series regardless of traffic volume — the opposite of tagging by customer_id or cart.id, which would be unbounded. What to show: this exact line, then a Mimir query for orders_placed_total.</a:t>
             </a:r>
             <a:endParaRPr lang="en-US" dirty="0"/>
           </a:p>
@@ -2034,7 +2034,7 @@
           <a:p>
             <a:r>
               <a:rPr lang="en-US" dirty="0"/>
-              <a:t>This is a small but real distinction worth calling out: the agent's own instrumentation settings are exposed as JVM -D system properties, not environment variables it autoconfigures from. entrypoint.sh is the translation layer between the compose-level environment variable this tutorial's toggle uses and the agent's actual configuration surface. What to show: run the order service with the toggle flipped both ways and diff the resulting java command line.</a:t>
+              <a:t>This distinction matters: the agent's own instrumentation settings are exposed as JVM -D system properties, not environment variables it autoconfigures from. entrypoint.sh is the translation layer between the compose-level environment variable this tutorial's toggle uses and the agent's actual configuration surface. What to show: run the order service with the toggle flipped both ways and diff the resulting java command line.</a:t>
             </a:r>
             <a:endParaRPr lang="en-US" dirty="0"/>
           </a:p>
@@ -2826,7 +2826,7 @@
           <a:p>
             <a:r>
               <a:rPr lang="en-US" dirty="0"/>
-              <a:t>This is a two-step dance worth noticing: the image briefly switches back to USER root purely to create and chown one directory, then drops straight back to the unprivileged uid 185 it runs as. Skipping this produces a logback FILE appender that fails to write with a permission-denied error the console appender masks, since console output still works fine. What to show: the full Containerfile, including the build-stage comment about why that earlier stage runs as root too (Maven needs to create /build/target under rootless podman).</a:t>
+              <a:t>This is a two-step sequence: the image briefly switches back to USER root purely to create and chown one directory, then drops straight back to the unprivileged uid 185 it runs as. Skipping this produces a logback FILE appender that fails to write with a permission-denied error the console appender masks, since console output still works fine. What to show: the full Containerfile, including the build-stage comment about why that earlier stage runs as root too (Maven needs to create /build/target under rootless podman).</a:t>
             </a:r>
             <a:endParaRPr lang="en-US" dirty="0"/>
           </a:p>
@@ -3266,7 +3266,7 @@
           <a:p>
             <a:r>
               <a:rPr lang="en-US" dirty="0"/>
-              <a:t>This is the headline fact of the whole deck, and it's worth stating plainly: do not add opentelemetry-spring-boot-starter to a Boot 4.1.x pom.xml. It will not quietly misbehave, it will fail the build. What to show: nothing yet — the fix is the javaagent, covered next.</a:t>
+              <a:t>This is the headline fact of the whole deck: do not add opentelemetry-spring-boot-starter to a Boot 4.1.x pom.xml. It will not quietly misbehave, it will fail the build. What to show: nothing yet — the fix is the javaagent, covered next.</a:t>
             </a:r>
             <a:endParaRPr lang="en-US" dirty="0"/>
           </a:p>
@@ -8493,7 +8493,7 @@
                 <a:ea typeface="Red Hat Text" pitchFamily="34" charset="-122"/>
                 <a:cs typeface="Red Hat Text" pitchFamily="34" charset="-120"/>
               </a:rPr>
-              <a:t>Resource attributes and three Boot-4 gotchas this tutorial hit for real</a:t>
+              <a:t>Resource attributes and three Boot-4 configuration issues this tutorial encountered and fixed</a:t>
             </a:r>
             <a:endParaRPr lang="en-US" sz="1700" dirty="0"/>
           </a:p>
@@ -12431,7 +12431,7 @@
                 <a:ea typeface="Red Hat Text" pitchFamily="34" charset="-122"/>
                 <a:cs typeface="Red Hat Text" pitchFamily="34" charset="-120"/>
               </a:rPr>
-              <a:t>Resource attributes and three Boot-4 gotchas hit for real.</a:t>
+              <a:t>Resource attributes and three Boot-4 configuration issues this tutorial encountered and fixed.</a:t>
             </a:r>
             <a:endParaRPr lang="en-US" sz="1600" dirty="0"/>
           </a:p>

--- a/presentations/observability-otel-201-spring.pptx
+++ b/presentations/observability-otel-201-spring.pptx
@@ -42,9 +42,10 @@
     <p:sldId id="290" r:id="rId36"/>
     <p:sldId id="291" r:id="rId37"/>
     <p:sldId id="292" r:id="rId38"/>
+    <p:sldId id="293" r:id="rId39"/>
   </p:sldIdLst>
   <p:notesMasterIdLst>
-    <p:notesMasterId r:id="rId39"/>
+    <p:notesMasterId r:id="rId40"/>
   </p:notesMasterIdLst>
   <p:sldSz cx="12192000" cy="6858000"/>
   <p:notesSz cx="6858000" cy="12192000"/>
@@ -3202,6 +3203,94 @@
             <a:fld id="{F7021451-1387-4CA6-816F-3879F97B5CBC}" type="slidenum">
               <a:rPr lang="en-US"/>
               <a:t>37</a:t>
+            </a:fld>
+            <a:endParaRPr lang="en-US"/>
+          </a:p>
+        </p:txBody>
+      </p:sp>
+    </p:spTree>
+    <p:extLst>
+      <p:ext uri="{BB962C8B-B14F-4D97-AF65-F5344CB8AC3E}">
+        <p14:creationId xmlns:p14="http://schemas.microsoft.com/office/powerpoint/2010/main" val="1024086991"/>
+      </p:ext>
+    </p:extLst>
+  </p:cSld>
+  <p:clrMapOvr>
+    <a:masterClrMapping/>
+  </p:clrMapOvr>
+</p:notes>
+</file>
+
+<file path=ppt/notesSlides/notesSlide38.xml><?xml version="1.0" encoding="utf-8"?>
+<p:notes xmlns:a="http://schemas.openxmlformats.org/drawingml/2006/main" xmlns:r="http://schemas.openxmlformats.org/officeDocument/2006/relationships" xmlns:p="http://schemas.openxmlformats.org/presentationml/2006/main">
+  <p:cSld>
+    <p:spTree>
+      <p:nvGrpSpPr>
+        <p:cNvPr id="1" name=""/>
+        <p:cNvGrpSpPr/>
+        <p:nvPr/>
+      </p:nvGrpSpPr>
+      <p:grpSpPr>
+        <a:xfrm>
+          <a:off x="0" y="0"/>
+          <a:ext cx="0" cy="0"/>
+          <a:chOff x="0" y="0"/>
+          <a:chExt cx="0" cy="0"/>
+        </a:xfrm>
+      </p:grpSpPr>
+      <p:sp>
+        <p:nvSpPr>
+          <p:cNvPr id="2" name="Slide Image Placeholder 1"/>
+          <p:cNvSpPr>
+            <a:spLocks noGrp="1" noRot="1" noChangeAspect="1"/>
+          </p:cNvSpPr>
+          <p:nvPr>
+            <p:ph type="sldImg"/>
+          </p:nvPr>
+        </p:nvSpPr>
+        <p:spPr/>
+      </p:sp>
+      <p:sp>
+        <p:nvSpPr>
+          <p:cNvPr id="3" name="Notes Placeholder 2"/>
+          <p:cNvSpPr>
+            <a:spLocks noGrp="1"/>
+          </p:cNvSpPr>
+          <p:nvPr>
+            <p:ph type="body" idx="1"/>
+          </p:nvPr>
+        </p:nvSpPr>
+        <p:spPr/>
+        <p:txBody>
+          <a:bodyPr/>
+          <a:lstStyle/>
+          <a:p>
+            <a:r>
+              <a:rPr lang="en-US" dirty="0"/>
+              <a:t>This is the Spring Boot implementation deck. The two codes take it with you: on the left, the site: the chapters, the runnable services, and the LGTM dashboards. On the right, the Workshops and Tutorials hub: every workshop, tutorial, and deck in the series in one place. Both are public on the Pattern Catalyst GitHub organization.</a:t>
+            </a:r>
+            <a:endParaRPr lang="en-US" dirty="0"/>
+          </a:p>
+        </p:txBody>
+      </p:sp>
+      <p:sp>
+        <p:nvSpPr>
+          <p:cNvPr id="4" name="Slide Number Placeholder 3"/>
+          <p:cNvSpPr>
+            <a:spLocks noGrp="1"/>
+          </p:cNvSpPr>
+          <p:nvPr>
+            <p:ph type="sldNum" sz="quarter" idx="10"/>
+          </p:nvPr>
+        </p:nvSpPr>
+        <p:spPr/>
+        <p:txBody>
+          <a:bodyPr/>
+          <a:lstStyle/>
+          <a:p>
+            <a:fld id="{F7021451-1387-4CA6-816F-3879F97B5CBC}" type="slidenum">
+              <a:rPr lang="en-US"/>
+              <a:t>38</a:t>
             </a:fld>
             <a:endParaRPr lang="en-US"/>
           </a:p>
@@ -16085,6 +16174,454 @@
               <a:t>one trace_id, four signals, one investigation — Spring Boot just gets there with one jar instead of a build-time extension or a zero-code launcher.</a:t>
             </a:r>
             <a:endParaRPr lang="en-US" sz="1700" dirty="0"/>
+          </a:p>
+        </p:txBody>
+      </p:sp>
+    </p:spTree>
+  </p:cSld>
+  <p:clrMapOvr>
+    <a:masterClrMapping/>
+  </p:clrMapOvr>
+</p:sld>
+</file>
+
+<file path=ppt/slides/slide38.xml><?xml version="1.0" encoding="utf-8"?>
+<p:sld xmlns:a="http://schemas.openxmlformats.org/drawingml/2006/main" xmlns:r="http://schemas.openxmlformats.org/officeDocument/2006/relationships" xmlns:p="http://schemas.openxmlformats.org/presentationml/2006/main">
+  <p:cSld name="Slide 38">
+    <p:spTree>
+      <p:nvGrpSpPr>
+        <p:cNvPr id="1" name=""/>
+        <p:cNvGrpSpPr/>
+        <p:nvPr/>
+      </p:nvGrpSpPr>
+      <p:grpSpPr>
+        <a:xfrm>
+          <a:off x="0" y="0"/>
+          <a:ext cx="0" cy="0"/>
+          <a:chOff x="0" y="0"/>
+          <a:chExt cx="0" cy="0"/>
+        </a:xfrm>
+      </p:grpSpPr>
+      <p:sp>
+        <p:nvSpPr>
+          <p:cNvPr id="2" name="Text 0"/>
+          <p:cNvSpPr/>
+          <p:nvPr/>
+        </p:nvSpPr>
+        <p:spPr>
+          <a:xfrm>
+            <a:off x="566928" y="6364224"/>
+            <a:ext cx="914400" cy="274320"/>
+          </a:xfrm>
+          <a:prstGeom prst="rect">
+            <a:avLst/>
+          </a:prstGeom>
+          <a:noFill/>
+          <a:ln/>
+        </p:spPr>
+        <p:txBody>
+          <a:bodyPr wrap="square" rtlCol="0" anchor="ctr"/>
+          <a:lstStyle/>
+          <a:p>
+            <a:pPr algn="l" indent="0" marL="0">
+              <a:buNone/>
+            </a:pPr>
+            <a:r>
+              <a:rPr lang="en-US" sz="1000" dirty="0">
+                <a:solidFill>
+                  <a:srgbClr val="8A8A8A"/>
+                </a:solidFill>
+                <a:latin typeface="Red Hat Text" pitchFamily="34" charset="0"/>
+                <a:ea typeface="Red Hat Text" pitchFamily="34" charset="-122"/>
+                <a:cs typeface="Red Hat Text" pitchFamily="34" charset="-120"/>
+              </a:rPr>
+              <a:t>38</a:t>
+            </a:r>
+            <a:endParaRPr lang="en-US" sz="1000" dirty="0"/>
+          </a:p>
+        </p:txBody>
+      </p:sp>
+      <p:pic>
+        <p:nvPicPr>
+          <p:cNvPr id="3" name="Image 0" descr="./assets/logo-candidate-2.png">    </p:cNvPr>
+          <p:cNvPicPr>
+            <a:picLocks noChangeAspect="1"/>
+          </p:cNvPicPr>
+          <p:nvPr/>
+        </p:nvPicPr>
+        <p:blipFill>
+          <a:blip r:embed="rId1"/>
+          <a:stretch>
+            <a:fillRect/>
+          </a:stretch>
+        </p:blipFill>
+        <p:spPr>
+          <a:xfrm>
+            <a:off x="10561320" y="6355080"/>
+            <a:ext cx="1033272" cy="246888"/>
+          </a:xfrm>
+          <a:prstGeom prst="rect">
+            <a:avLst/>
+          </a:prstGeom>
+        </p:spPr>
+      </p:pic>
+      <p:sp>
+        <p:nvSpPr>
+          <p:cNvPr id="4" name="Text 1"/>
+          <p:cNvSpPr/>
+          <p:nvPr/>
+        </p:nvSpPr>
+        <p:spPr>
+          <a:xfrm>
+            <a:off x="566928" y="384048"/>
+            <a:ext cx="11055096" cy="292608"/>
+          </a:xfrm>
+          <a:prstGeom prst="rect">
+            <a:avLst/>
+          </a:prstGeom>
+          <a:noFill/>
+          <a:ln/>
+        </p:spPr>
+        <p:txBody>
+          <a:bodyPr wrap="square" rtlCol="0" anchor="ctr"/>
+          <a:lstStyle/>
+          <a:p>
+            <a:pPr algn="l" indent="0" marL="0">
+              <a:buNone/>
+            </a:pPr>
+            <a:r>
+              <a:rPr lang="en-US" sz="1200" b="1" spc="400" kern="0" dirty="0">
+                <a:solidFill>
+                  <a:srgbClr val="EE0000"/>
+                </a:solidFill>
+                <a:latin typeface="Red Hat Display" pitchFamily="34" charset="0"/>
+                <a:ea typeface="Red Hat Display" pitchFamily="34" charset="-122"/>
+                <a:cs typeface="Red Hat Display" pitchFamily="34" charset="-120"/>
+              </a:rPr>
+              <a:t>SCAN TO EXPLORE</a:t>
+            </a:r>
+            <a:endParaRPr lang="en-US" sz="1200" dirty="0"/>
+          </a:p>
+        </p:txBody>
+      </p:sp>
+      <p:sp>
+        <p:nvSpPr>
+          <p:cNvPr id="5" name="Text 2"/>
+          <p:cNvSpPr/>
+          <p:nvPr/>
+        </p:nvSpPr>
+        <p:spPr>
+          <a:xfrm>
+            <a:off x="566928" y="676656"/>
+            <a:ext cx="11055096" cy="1005840"/>
+          </a:xfrm>
+          <a:prstGeom prst="rect">
+            <a:avLst/>
+          </a:prstGeom>
+          <a:noFill/>
+          <a:ln/>
+        </p:spPr>
+        <p:txBody>
+          <a:bodyPr wrap="square" rtlCol="0" anchor="t"/>
+          <a:lstStyle/>
+          <a:p>
+            <a:pPr algn="l" indent="0" marL="0">
+              <a:buNone/>
+            </a:pPr>
+            <a:r>
+              <a:rPr lang="en-US" sz="3000" b="1" dirty="0">
+                <a:solidFill>
+                  <a:srgbClr val="151515"/>
+                </a:solidFill>
+                <a:latin typeface="Red Hat Display" pitchFamily="34" charset="0"/>
+                <a:ea typeface="Red Hat Display" pitchFamily="34" charset="-122"/>
+                <a:cs typeface="Red Hat Display" pitchFamily="34" charset="-120"/>
+              </a:rPr>
+              <a:t>Take it with you</a:t>
+            </a:r>
+            <a:endParaRPr lang="en-US" sz="3000" dirty="0"/>
+          </a:p>
+        </p:txBody>
+      </p:sp>
+      <p:pic>
+        <p:nvPicPr>
+          <p:cNvPr id="6" name="Image 1" descr="./assets/qr-otel-site.png">    </p:cNvPr>
+          <p:cNvPicPr>
+            <a:picLocks noChangeAspect="1"/>
+          </p:cNvPicPr>
+          <p:nvPr/>
+        </p:nvPicPr>
+        <p:blipFill>
+          <a:blip r:embed="rId2"/>
+          <a:stretch>
+            <a:fillRect/>
+          </a:stretch>
+        </p:blipFill>
+        <p:spPr>
+          <a:xfrm>
+            <a:off x="2103120" y="1627632"/>
+            <a:ext cx="2834640" cy="2834640"/>
+          </a:xfrm>
+          <a:prstGeom prst="rect">
+            <a:avLst/>
+          </a:prstGeom>
+        </p:spPr>
+      </p:pic>
+      <p:sp>
+        <p:nvSpPr>
+          <p:cNvPr id="7" name="Text 3"/>
+          <p:cNvSpPr/>
+          <p:nvPr/>
+        </p:nvSpPr>
+        <p:spPr>
+          <a:xfrm>
+            <a:off x="1417320" y="4553712"/>
+            <a:ext cx="4206240" cy="365760"/>
+          </a:xfrm>
+          <a:prstGeom prst="rect">
+            <a:avLst/>
+          </a:prstGeom>
+          <a:noFill/>
+          <a:ln/>
+        </p:spPr>
+        <p:txBody>
+          <a:bodyPr wrap="square" rtlCol="0" anchor="ctr"/>
+          <a:lstStyle/>
+          <a:p>
+            <a:pPr algn="ctr" indent="0" marL="0">
+              <a:buNone/>
+            </a:pPr>
+            <a:r>
+              <a:rPr lang="en-US" sz="1800" b="1" dirty="0">
+                <a:solidFill>
+                  <a:srgbClr val="151515"/>
+                </a:solidFill>
+                <a:latin typeface="Red Hat Display" pitchFamily="34" charset="0"/>
+                <a:ea typeface="Red Hat Display" pitchFamily="34" charset="-122"/>
+                <a:cs typeface="Red Hat Display" pitchFamily="34" charset="-120"/>
+              </a:rPr>
+              <a:t>The site</a:t>
+            </a:r>
+            <a:endParaRPr lang="en-US" sz="1800" dirty="0"/>
+          </a:p>
+        </p:txBody>
+      </p:sp>
+      <p:sp>
+        <p:nvSpPr>
+          <p:cNvPr id="8" name="Text 4"/>
+          <p:cNvSpPr/>
+          <p:nvPr/>
+        </p:nvSpPr>
+        <p:spPr>
+          <a:xfrm>
+            <a:off x="1325880" y="4937760"/>
+            <a:ext cx="4389120" cy="658368"/>
+          </a:xfrm>
+          <a:prstGeom prst="rect">
+            <a:avLst/>
+          </a:prstGeom>
+          <a:noFill/>
+          <a:ln/>
+        </p:spPr>
+        <p:txBody>
+          <a:bodyPr wrap="square" rtlCol="0" anchor="t"/>
+          <a:lstStyle/>
+          <a:p>
+            <a:pPr algn="ctr" indent="0" marL="0">
+              <a:buNone/>
+            </a:pPr>
+            <a:r>
+              <a:rPr lang="en-US" sz="1300" i="1" dirty="0">
+                <a:solidFill>
+                  <a:srgbClr val="5A5A5A"/>
+                </a:solidFill>
+                <a:latin typeface="Red Hat Text" pitchFamily="34" charset="0"/>
+                <a:ea typeface="Red Hat Text" pitchFamily="34" charset="-122"/>
+                <a:cs typeface="Red Hat Text" pitchFamily="34" charset="-120"/>
+              </a:rPr>
+              <a:t>Chapters, the runnable services, and the LGTM dashboards</a:t>
+            </a:r>
+            <a:endParaRPr lang="en-US" sz="1300" dirty="0"/>
+          </a:p>
+        </p:txBody>
+      </p:sp>
+      <p:sp>
+        <p:nvSpPr>
+          <p:cNvPr id="9" name="Text 5"/>
+          <p:cNvSpPr/>
+          <p:nvPr/>
+        </p:nvSpPr>
+        <p:spPr>
+          <a:xfrm>
+            <a:off x="1325880" y="5596128"/>
+            <a:ext cx="4389120" cy="292608"/>
+          </a:xfrm>
+          <a:prstGeom prst="rect">
+            <a:avLst/>
+          </a:prstGeom>
+          <a:noFill/>
+          <a:ln/>
+        </p:spPr>
+        <p:txBody>
+          <a:bodyPr wrap="square" rtlCol="0" anchor="ctr"/>
+          <a:lstStyle/>
+          <a:p>
+            <a:pPr algn="ctr" indent="0" marL="0">
+              <a:buNone/>
+            </a:pPr>
+            <a:r>
+              <a:rPr lang="en-US" sz="1000" dirty="0">
+                <a:solidFill>
+                  <a:srgbClr val="EE0000"/>
+                </a:solidFill>
+                <a:latin typeface="Red Hat Mono" pitchFamily="34" charset="0"/>
+                <a:ea typeface="Red Hat Mono" pitchFamily="34" charset="-122"/>
+                <a:cs typeface="Red Hat Mono" pitchFamily="34" charset="-120"/>
+              </a:rPr>
+              <a:t>patterncatalyst.github.io/otel-observability-tutorial</a:t>
+            </a:r>
+            <a:endParaRPr lang="en-US" sz="1000" dirty="0"/>
+          </a:p>
+        </p:txBody>
+      </p:sp>
+      <p:pic>
+        <p:nvPicPr>
+          <p:cNvPr id="10" name="Image 2" descr="./assets/qr-hub.png">    </p:cNvPr>
+          <p:cNvPicPr>
+            <a:picLocks noChangeAspect="1"/>
+          </p:cNvPicPr>
+          <p:nvPr/>
+        </p:nvPicPr>
+        <p:blipFill>
+          <a:blip r:embed="rId3"/>
+          <a:stretch>
+            <a:fillRect/>
+          </a:stretch>
+        </p:blipFill>
+        <p:spPr>
+          <a:xfrm>
+            <a:off x="7251192" y="1627632"/>
+            <a:ext cx="2834640" cy="2834640"/>
+          </a:xfrm>
+          <a:prstGeom prst="rect">
+            <a:avLst/>
+          </a:prstGeom>
+        </p:spPr>
+      </p:pic>
+      <p:sp>
+        <p:nvSpPr>
+          <p:cNvPr id="11" name="Text 6"/>
+          <p:cNvSpPr/>
+          <p:nvPr/>
+        </p:nvSpPr>
+        <p:spPr>
+          <a:xfrm>
+            <a:off x="6565392" y="4553712"/>
+            <a:ext cx="4206240" cy="365760"/>
+          </a:xfrm>
+          <a:prstGeom prst="rect">
+            <a:avLst/>
+          </a:prstGeom>
+          <a:noFill/>
+          <a:ln/>
+        </p:spPr>
+        <p:txBody>
+          <a:bodyPr wrap="square" rtlCol="0" anchor="ctr"/>
+          <a:lstStyle/>
+          <a:p>
+            <a:pPr algn="ctr" indent="0" marL="0">
+              <a:buNone/>
+            </a:pPr>
+            <a:r>
+              <a:rPr lang="en-US" sz="1800" b="1" dirty="0">
+                <a:solidFill>
+                  <a:srgbClr val="151515"/>
+                </a:solidFill>
+                <a:latin typeface="Red Hat Display" pitchFamily="34" charset="0"/>
+                <a:ea typeface="Red Hat Display" pitchFamily="34" charset="-122"/>
+                <a:cs typeface="Red Hat Display" pitchFamily="34" charset="-120"/>
+              </a:rPr>
+              <a:t>Workshops &amp; Tutorials</a:t>
+            </a:r>
+            <a:endParaRPr lang="en-US" sz="1800" dirty="0"/>
+          </a:p>
+        </p:txBody>
+      </p:sp>
+      <p:sp>
+        <p:nvSpPr>
+          <p:cNvPr id="12" name="Text 7"/>
+          <p:cNvSpPr/>
+          <p:nvPr/>
+        </p:nvSpPr>
+        <p:spPr>
+          <a:xfrm>
+            <a:off x="6473952" y="4937760"/>
+            <a:ext cx="4389120" cy="658368"/>
+          </a:xfrm>
+          <a:prstGeom prst="rect">
+            <a:avLst/>
+          </a:prstGeom>
+          <a:noFill/>
+          <a:ln/>
+        </p:spPr>
+        <p:txBody>
+          <a:bodyPr wrap="square" rtlCol="0" anchor="t"/>
+          <a:lstStyle/>
+          <a:p>
+            <a:pPr algn="ctr" indent="0" marL="0">
+              <a:buNone/>
+            </a:pPr>
+            <a:r>
+              <a:rPr lang="en-US" sz="1300" i="1" dirty="0">
+                <a:solidFill>
+                  <a:srgbClr val="5A5A5A"/>
+                </a:solidFill>
+                <a:latin typeface="Red Hat Text" pitchFamily="34" charset="0"/>
+                <a:ea typeface="Red Hat Text" pitchFamily="34" charset="-122"/>
+                <a:cs typeface="Red Hat Text" pitchFamily="34" charset="-120"/>
+              </a:rPr>
+              <a:t>The whole series: every workshop, tutorial, and deck in one place</a:t>
+            </a:r>
+            <a:endParaRPr lang="en-US" sz="1300" dirty="0"/>
+          </a:p>
+        </p:txBody>
+      </p:sp>
+      <p:sp>
+        <p:nvSpPr>
+          <p:cNvPr id="13" name="Text 8"/>
+          <p:cNvSpPr/>
+          <p:nvPr/>
+        </p:nvSpPr>
+        <p:spPr>
+          <a:xfrm>
+            <a:off x="6473952" y="5596128"/>
+            <a:ext cx="4389120" cy="292608"/>
+          </a:xfrm>
+          <a:prstGeom prst="rect">
+            <a:avLst/>
+          </a:prstGeom>
+          <a:noFill/>
+          <a:ln/>
+        </p:spPr>
+        <p:txBody>
+          <a:bodyPr wrap="square" rtlCol="0" anchor="ctr"/>
+          <a:lstStyle/>
+          <a:p>
+            <a:pPr algn="ctr" indent="0" marL="0">
+              <a:buNone/>
+            </a:pPr>
+            <a:r>
+              <a:rPr lang="en-US" sz="900" dirty="0">
+                <a:solidFill>
+                  <a:srgbClr val="EE0000"/>
+                </a:solidFill>
+                <a:latin typeface="Red Hat Mono" pitchFamily="34" charset="0"/>
+                <a:ea typeface="Red Hat Mono" pitchFamily="34" charset="-122"/>
+                <a:cs typeface="Red Hat Mono" pitchFamily="34" charset="-120"/>
+              </a:rPr>
+              <a:t>patterncatalyst.github.io/patterncatalyst-workshops-tutorials-list</a:t>
+            </a:r>
+            <a:endParaRPr lang="en-US" sz="900" dirty="0"/>
           </a:p>
         </p:txBody>
       </p:sp>
